--- a/pptx/tailwind.pptx
+++ b/pptx/tailwind.pptx
@@ -33,35 +33,35 @@
   <p:embeddedFontLst>
     <p:embeddedFont>
       <p:font typeface="SimSun" panose="02010600030101010101" pitchFamily="2" charset="-122"/>
-      <p:regular r:id="rId24"/>
+      <p:regular r:id="rId25"/>
     </p:embeddedFont>
     <p:embeddedFont>
       <p:font typeface="Lao UI" panose="020B0502040204020203" pitchFamily="34" charset="0"/>
-      <p:regular r:id="rId25"/>
+      <p:regular r:id="rId26"/>
     </p:embeddedFont>
     <p:embeddedFont>
       <p:font typeface="Microsoft YaHei" panose="020B0503020204020204" pitchFamily="34" charset="-122"/>
-      <p:regular r:id="rId26"/>
+      <p:regular r:id="rId27"/>
     </p:embeddedFont>
     <p:embeddedFont>
       <p:font typeface="Calibri" panose="020F0502020204030204" pitchFamily="34" charset="0"/>
-      <p:regular r:id="rId27"/>
-      <p:bold r:id="rId28"/>
-      <p:italic r:id="rId29"/>
-      <p:boldItalic r:id="rId30"/>
+      <p:regular r:id="rId28"/>
+      <p:bold r:id="rId29"/>
+      <p:italic r:id="rId30"/>
+      <p:boldItalic r:id="rId31"/>
     </p:embeddedFont>
     <p:embeddedFont>
       <p:font typeface="Bahnschrift" panose="020B0502040204020203" charset="0"/>
-      <p:regular r:id="rId31"/>
-      <p:bold r:id="rId32"/>
+      <p:regular r:id="rId32"/>
+      <p:bold r:id="rId33"/>
     </p:embeddedFont>
     <p:embeddedFont>
       <p:font typeface="Arial Rounded MT Bold" panose="020F0704030504030204" charset="0"/>
-      <p:regular r:id="rId33"/>
+      <p:regular r:id="rId34"/>
     </p:embeddedFont>
     <p:embeddedFont>
       <p:font typeface="Arial Unicode MS" panose="020B0604020202020204" charset="-122"/>
-      <p:regular r:id="rId34"/>
+      <p:regular r:id="rId35"/>
     </p:embeddedFont>
   </p:embeddedFontLst>
   <p:defaultTextStyle>
@@ -274,6 +274,21 @@
     </p:ext>
   </p:extLst>
 </p:presentation>
+</file>
+
+<file path=ppt/commentAuthors.xml><?xml version="1.0" encoding="utf-8"?>
+<p:cmAuthorLst xmlns:a="http://schemas.openxmlformats.org/drawingml/2006/main" xmlns:r="http://schemas.openxmlformats.org/officeDocument/2006/relationships" xmlns:p="http://schemas.openxmlformats.org/presentationml/2006/main">
+  <p:cmAuthor id="1" name="Fiderana Rah" initials="authorId_702249091" lastIdx="1" clrIdx="0"/>
+</p:cmAuthorLst>
+</file>
+
+<file path=ppt/comments/comment1.xml><?xml version="1.0" encoding="utf-8"?>
+<p:cmLst xmlns:a="http://schemas.openxmlformats.org/drawingml/2006/main" xmlns:r="http://schemas.openxmlformats.org/officeDocument/2006/relationships" xmlns:p="http://schemas.openxmlformats.org/presentationml/2006/main">
+  <p:cm authorId="1" dt="2025-12-01T08:09:01.192" idx="1">
+    <p:pos x="10" y="10"/>
+    <p:text>Regardez l'exemple : pour créer une carte blanche, avec du padding, des coins arrondis et une ombre, il suffit d'ajouter les classes bg-white, p-4, rounded-xl, et shadow. Tout existe déjà.</p:text>
+  </p:cm>
+</p:cmLst>
 </file>
 
 <file path=ppt/handoutMasters/handoutMaster1.xml><?xml version="1.0" encoding="utf-8"?>
@@ -10468,8 +10483,8 @@
         </p:nvSpPr>
         <p:spPr>
           <a:xfrm>
-            <a:off x="972185" y="379730"/>
-            <a:ext cx="7400925" cy="4530725"/>
+            <a:off x="971550" y="793750"/>
+            <a:ext cx="7400925" cy="3926840"/>
           </a:xfrm>
           <a:prstGeom prst="rect">
             <a:avLst/>
@@ -10536,13 +10551,6 @@
             </a:endParaRPr>
           </a:p>
           <a:p>
-            <a:endParaRPr lang="en-US" altLang="fr-FR">
-              <a:solidFill>
-                <a:srgbClr val="FF0000"/>
-              </a:solidFill>
-            </a:endParaRPr>
-          </a:p>
-          <a:p>
             <a:r>
               <a:rPr lang="en-US" altLang="fr-FR">
                 <a:solidFill>
@@ -10598,13 +10606,6 @@
               </a:rPr>
               <a:t>Tu utilises des petites classes utilitaires directement dans ton HTML.</a:t>
             </a:r>
-            <a:endParaRPr lang="en-US" altLang="fr-FR">
-              <a:solidFill>
-                <a:schemeClr val="bg1"/>
-              </a:solidFill>
-            </a:endParaRPr>
-          </a:p>
-          <a:p>
             <a:endParaRPr lang="en-US" altLang="fr-FR">
               <a:solidFill>
                 <a:schemeClr val="bg1"/>
@@ -10983,13 +10984,6 @@
               </a:rPr>
               <a:t>:</a:t>
             </a:r>
-            <a:endParaRPr lang="en-US" altLang="fr-FR">
-              <a:solidFill>
-                <a:schemeClr val="bg1"/>
-              </a:solidFill>
-            </a:endParaRPr>
-          </a:p>
-          <a:p>
             <a:endParaRPr lang="en-US" altLang="fr-FR">
               <a:solidFill>
                 <a:schemeClr val="bg1"/>
@@ -11022,6 +11016,43 @@
             <a:endParaRPr lang="en-US" altLang="fr-FR">
               <a:solidFill>
                 <a:schemeClr val="bg1"/>
+              </a:solidFill>
+            </a:endParaRPr>
+          </a:p>
+        </p:txBody>
+      </p:sp>
+      <p:sp>
+        <p:nvSpPr>
+          <p:cNvPr id="14" name="Zone de texte 13"/>
+          <p:cNvSpPr txBox="1"/>
+          <p:nvPr/>
+        </p:nvSpPr>
+        <p:spPr>
+          <a:xfrm>
+            <a:off x="1034415" y="359410"/>
+            <a:ext cx="7042150" cy="368300"/>
+          </a:xfrm>
+          <a:prstGeom prst="rect">
+            <a:avLst/>
+          </a:prstGeom>
+          <a:noFill/>
+        </p:spPr>
+        <p:txBody>
+          <a:bodyPr wrap="square" rtlCol="0">
+            <a:spAutoFit/>
+          </a:bodyPr>
+          <a:p>
+            <a:r>
+              <a:rPr lang="fr-FR" altLang="en-US" b="1" i="1">
+                <a:solidFill>
+                  <a:srgbClr val="FFFF00"/>
+                </a:solidFill>
+              </a:rPr>
+              <a:t>LES BUTS DE TAILWIND CSS :</a:t>
+            </a:r>
+            <a:endParaRPr lang="fr-FR" altLang="en-US" b="1" i="1">
+              <a:solidFill>
+                <a:srgbClr val="FFFF00"/>
               </a:solidFill>
             </a:endParaRPr>
           </a:p>
@@ -14825,14 +14856,14 @@
             <a:r>
               <a:rPr lang="fr-FR" altLang="en-US" sz="2000" b="1" i="1" u="sng">
                 <a:solidFill>
-                  <a:schemeClr val="bg1"/>
+                  <a:srgbClr val="FFFF00"/>
                 </a:solidFill>
               </a:rPr>
               <a:t>Inconvénients :</a:t>
             </a:r>
             <a:endParaRPr lang="fr-FR" altLang="en-US" sz="2000" b="1" i="1" u="sng">
               <a:solidFill>
-                <a:schemeClr val="bg1"/>
+                <a:srgbClr val="FFFF00"/>
               </a:solidFill>
             </a:endParaRPr>
           </a:p>
@@ -17215,14 +17246,14 @@
             <a:r>
               <a:rPr lang="fr-FR" altLang="en-US" sz="2000" b="1" i="1" u="sng">
                 <a:solidFill>
-                  <a:schemeClr val="bg1"/>
+                  <a:srgbClr val="FFFF00"/>
                 </a:solidFill>
               </a:rPr>
               <a:t>Lien vers le site web :</a:t>
             </a:r>
             <a:endParaRPr lang="fr-FR" altLang="en-US" sz="2000" b="1" i="1" u="sng">
               <a:solidFill>
-                <a:schemeClr val="bg1"/>
+                <a:srgbClr val="FFFF00"/>
               </a:solidFill>
             </a:endParaRPr>
           </a:p>
@@ -38645,7 +38676,7 @@
                   <a:noFill/>
                 </a:ln>
                 <a:solidFill>
-                  <a:schemeClr val="bg1"/>
+                  <a:srgbClr val="FFFF00"/>
                 </a:solidFill>
                 <a:effectLst/>
                 <a:uLnTx/>
@@ -38663,7 +38694,7 @@
                   <a:noFill/>
                 </a:ln>
                 <a:solidFill>
-                  <a:schemeClr val="bg1"/>
+                  <a:srgbClr val="FFFF00"/>
                 </a:solidFill>
                 <a:effectLst/>
                 <a:uLnTx/>
@@ -38681,7 +38712,7 @@
                   <a:noFill/>
                 </a:ln>
                 <a:solidFill>
-                  <a:schemeClr val="bg1"/>
+                  <a:srgbClr val="FFFF00"/>
                 </a:solidFill>
                 <a:effectLst/>
                 <a:uLnTx/>
@@ -38699,7 +38730,7 @@
                   <a:noFill/>
                 </a:ln>
                 <a:solidFill>
-                  <a:schemeClr val="bg1"/>
+                  <a:srgbClr val="FFFF00"/>
                 </a:solidFill>
                 <a:effectLst/>
                 <a:uLnTx/>
@@ -38717,7 +38748,7 @@
                   <a:noFill/>
                 </a:ln>
                 <a:solidFill>
-                  <a:schemeClr val="bg1"/>
+                  <a:srgbClr val="FFFF00"/>
                 </a:solidFill>
                 <a:effectLst/>
                 <a:uLnTx/>
@@ -43192,7 +43223,7 @@
                   <a:noFill/>
                 </a:ln>
                 <a:solidFill>
-                  <a:schemeClr val="bg1"/>
+                  <a:srgbClr val="FFFF00"/>
                 </a:solidFill>
                 <a:effectLst/>
                 <a:uLnTx/>
@@ -43210,7 +43241,7 @@
                   <a:noFill/>
                 </a:ln>
                 <a:solidFill>
-                  <a:schemeClr val="bg1"/>
+                  <a:srgbClr val="FFFF00"/>
                 </a:solidFill>
                 <a:effectLst/>
                 <a:uLnTx/>
@@ -43228,7 +43259,7 @@
                   <a:noFill/>
                 </a:ln>
                 <a:solidFill>
-                  <a:schemeClr val="bg1"/>
+                  <a:srgbClr val="FFFF00"/>
                 </a:solidFill>
                 <a:effectLst/>
                 <a:uLnTx/>
@@ -43246,7 +43277,7 @@
                   <a:noFill/>
                 </a:ln>
                 <a:solidFill>
-                  <a:schemeClr val="bg1"/>
+                  <a:srgbClr val="FFFF00"/>
                 </a:solidFill>
                 <a:effectLst/>
                 <a:uLnTx/>
@@ -43264,7 +43295,7 @@
                   <a:noFill/>
                 </a:ln>
                 <a:solidFill>
-                  <a:schemeClr val="bg1"/>
+                  <a:srgbClr val="FFFF00"/>
                 </a:solidFill>
                 <a:effectLst/>
                 <a:uLnTx/>
@@ -43274,7 +43305,25 @@
                 <a:cs typeface="Arial" panose="020B0604020202020204" pitchFamily="34" charset="0"/>
                 <a:sym typeface="+mn-ea"/>
               </a:rPr>
-              <a:t>POUR LE MAITRISER </a:t>
+              <a:t>POUR LE MAITRISER</a:t>
+            </a:r>
+            <a:r>
+              <a:rPr lang="en-US" altLang="fr-FR" sz="2000" b="1" i="1" u="sng" kern="100" noProof="0" dirty="0">
+                <a:ln>
+                  <a:noFill/>
+                </a:ln>
+                <a:solidFill>
+                  <a:schemeClr val="bg1"/>
+                </a:solidFill>
+                <a:effectLst/>
+                <a:uLnTx/>
+                <a:uFillTx/>
+                <a:latin typeface="Arial" panose="020B0604020202020204" pitchFamily="34" charset="0"/>
+                <a:ea typeface="Arial" panose="020B0604020202020204" pitchFamily="34" charset="0"/>
+                <a:cs typeface="Arial" panose="020B0604020202020204" pitchFamily="34" charset="0"/>
+                <a:sym typeface="+mn-ea"/>
+              </a:rPr>
+              <a:t> </a:t>
             </a:r>
             <a:endParaRPr kumimoji="0" lang="en-US" altLang="fr-FR" sz="2000" b="1" i="1" u="sng" strike="noStrike" kern="100" cap="none" spc="0" normalizeH="0" baseline="0" noProof="0" dirty="0">
               <a:ln>
